--- a/assets/connpass-eyecatch/P033_eyecatch_temp.pptx
+++ b/assets/connpass-eyecatch/P033_eyecatch_temp.pptx
@@ -8918,7 +8918,7 @@
                 <a:ea typeface="Noto Sans JP" pitchFamily="34" charset="-122"/>
                 <a:cs typeface="Noto Sans JP" pitchFamily="34" charset="-120"/>
               </a:rPr>
-              <a:t>第33回：列名で迷わない</a:t>
+              <a:t>第33回：SharePointリストから</a:t>
             </a:r>
           </a:p>
           <a:p>
@@ -8934,7 +8934,7 @@
                 <a:ea typeface="Noto Sans JP" pitchFamily="34" charset="-122"/>
                 <a:cs typeface="Noto Sans JP" pitchFamily="34" charset="-120"/>
               </a:rPr>
-              <a:t>SharePointリスト連携</a:t>
+              <a:t>欲しい行だけ取り出す</a:t>
             </a:r>
           </a:p>
           <a:p>
@@ -8950,7 +8950,7 @@
                 <a:ea typeface="Noto Sans JP" pitchFamily="34" charset="-122"/>
                 <a:cs typeface="Noto Sans JP" pitchFamily="34" charset="-120"/>
               </a:rPr>
-              <a:t>絞り込みの式は</a:t>
+              <a:t>列の内部名をフローで一覧に</a:t>
             </a:r>
             <a:r>
               <a:rPr lang="en-US" sz="4500" b="1">
@@ -8961,7 +8961,7 @@
                 <a:ea typeface="Noto Sans JP" pitchFamily="34" charset="-122"/>
                 <a:cs typeface="Noto Sans JP" pitchFamily="34" charset="-120"/>
               </a:rPr>
-              <a:t>Copilot</a:t>
+              <a:t/>
             </a:r>
             <a:r>
               <a:rPr lang="en-US" sz="4500" b="1">
@@ -8972,7 +8972,7 @@
                 <a:ea typeface="Noto Sans JP" pitchFamily="34" charset="-122"/>
                 <a:cs typeface="Noto Sans JP" pitchFamily="34" charset="-120"/>
               </a:rPr>
-              <a:t>と</a:t>
+              <a:t/>
             </a:r>
             <a:endParaRPr lang="en-US" sz="4500" dirty="0"/>
           </a:p>

--- a/assets/connpass-eyecatch/P033_eyecatch_temp.pptx
+++ b/assets/connpass-eyecatch/P033_eyecatch_temp.pptx
@@ -8918,7 +8918,7 @@
                 <a:ea typeface="Noto Sans JP" pitchFamily="34" charset="-122"/>
                 <a:cs typeface="Noto Sans JP" pitchFamily="34" charset="-120"/>
               </a:rPr>
-              <a:t>第33回：SharePointリストから</a:t>
+              <a:t>第33回：内部名で困らない</a:t>
             </a:r>
           </a:p>
           <a:p>
@@ -8934,7 +8934,7 @@
                 <a:ea typeface="Noto Sans JP" pitchFamily="34" charset="-122"/>
                 <a:cs typeface="Noto Sans JP" pitchFamily="34" charset="-120"/>
               </a:rPr>
-              <a:t>欲しい行だけ取り出す</a:t>
+              <a:t>列名のエラーで止まらない</a:t>
             </a:r>
           </a:p>
           <a:p>
@@ -8950,7 +8950,7 @@
                 <a:ea typeface="Noto Sans JP" pitchFamily="34" charset="-122"/>
                 <a:cs typeface="Noto Sans JP" pitchFamily="34" charset="-120"/>
               </a:rPr>
-              <a:t>列の内部名をフローで一覧に</a:t>
+              <a:t>SharePointリスト連携</a:t>
             </a:r>
             <a:r>
               <a:rPr lang="en-US" sz="4500" b="1">

--- a/assets/connpass-eyecatch/P033_eyecatch_temp.pptx
+++ b/assets/connpass-eyecatch/P033_eyecatch_temp.pptx
@@ -8934,7 +8934,7 @@
                 <a:ea typeface="Noto Sans JP" pitchFamily="34" charset="-122"/>
                 <a:cs typeface="Noto Sans JP" pitchFamily="34" charset="-120"/>
               </a:rPr>
-              <a:t>列名のエラーで止まらない</a:t>
+              <a:t>内部名はフローが自動で調べる</a:t>
             </a:r>
           </a:p>
           <a:p>
@@ -8950,7 +8950,7 @@
                 <a:ea typeface="Noto Sans JP" pitchFamily="34" charset="-122"/>
                 <a:cs typeface="Noto Sans JP" pitchFamily="34" charset="-120"/>
               </a:rPr>
-              <a:t>SharePointリスト連携</a:t>
+              <a:t>列名のエラーで止まらない</a:t>
             </a:r>
             <a:r>
               <a:rPr lang="en-US" sz="4500" b="1">
@@ -9045,7 +9045,7 @@
                 <a:ea typeface="Noto Sans JP" pitchFamily="34" charset="-122"/>
                 <a:cs typeface="Noto Sans JP" pitchFamily="34" charset="-120"/>
               </a:rPr>
-              <a:t>Theme　リストの列の内部名をフローで一覧にし、その名前で項目を絞り込む</a:t>
+              <a:t>Theme　リストの列の内部名を調べる作業を自動化し、その名前で項目を絞り込む</a:t>
             </a:r>
             <a:endParaRPr lang="en-US" dirty="0"/>
           </a:p>
